--- a/main.pptx
+++ b/main.pptx
@@ -206,7 +206,7 @@
           <a:p>
             <a:fld id="{40658A17-5F6A-4455-A03F-32873B3CCC6C}" type="datetimeFigureOut">
               <a:rPr lang="en-US" smtClean="0"/>
-              <a:t>2025-05-28</a:t>
+              <a:t>2025-06-08</a:t>
             </a:fld>
             <a:endParaRPr lang="en-US"/>
           </a:p>
@@ -788,7 +788,7 @@
           <a:p>
             <a:fld id="{B31607B0-DB75-4F72-BD65-E742B8908D12}" type="datetimeFigureOut">
               <a:rPr lang="en-US" smtClean="0"/>
-              <a:t>2025-05-28</a:t>
+              <a:t>2025-06-08</a:t>
             </a:fld>
             <a:endParaRPr lang="en-US"/>
           </a:p>
@@ -986,7 +986,7 @@
           <a:p>
             <a:fld id="{B31607B0-DB75-4F72-BD65-E742B8908D12}" type="datetimeFigureOut">
               <a:rPr lang="en-US" smtClean="0"/>
-              <a:t>2025-05-28</a:t>
+              <a:t>2025-06-08</a:t>
             </a:fld>
             <a:endParaRPr lang="en-US"/>
           </a:p>
@@ -1194,7 +1194,7 @@
           <a:p>
             <a:fld id="{B31607B0-DB75-4F72-BD65-E742B8908D12}" type="datetimeFigureOut">
               <a:rPr lang="en-US" smtClean="0"/>
-              <a:t>2025-05-28</a:t>
+              <a:t>2025-06-08</a:t>
             </a:fld>
             <a:endParaRPr lang="en-US"/>
           </a:p>
@@ -1392,7 +1392,7 @@
           <a:p>
             <a:fld id="{B31607B0-DB75-4F72-BD65-E742B8908D12}" type="datetimeFigureOut">
               <a:rPr lang="en-US" smtClean="0"/>
-              <a:t>2025-05-28</a:t>
+              <a:t>2025-06-08</a:t>
             </a:fld>
             <a:endParaRPr lang="en-US"/>
           </a:p>
@@ -1667,7 +1667,7 @@
           <a:p>
             <a:fld id="{B31607B0-DB75-4F72-BD65-E742B8908D12}" type="datetimeFigureOut">
               <a:rPr lang="en-US" smtClean="0"/>
-              <a:t>2025-05-28</a:t>
+              <a:t>2025-06-08</a:t>
             </a:fld>
             <a:endParaRPr lang="en-US"/>
           </a:p>
@@ -1932,7 +1932,7 @@
           <a:p>
             <a:fld id="{B31607B0-DB75-4F72-BD65-E742B8908D12}" type="datetimeFigureOut">
               <a:rPr lang="en-US" smtClean="0"/>
-              <a:t>2025-05-28</a:t>
+              <a:t>2025-06-08</a:t>
             </a:fld>
             <a:endParaRPr lang="en-US"/>
           </a:p>
@@ -2344,7 +2344,7 @@
           <a:p>
             <a:fld id="{B31607B0-DB75-4F72-BD65-E742B8908D12}" type="datetimeFigureOut">
               <a:rPr lang="en-US" smtClean="0"/>
-              <a:t>2025-05-28</a:t>
+              <a:t>2025-06-08</a:t>
             </a:fld>
             <a:endParaRPr lang="en-US"/>
           </a:p>
@@ -2485,7 +2485,7 @@
           <a:p>
             <a:fld id="{B31607B0-DB75-4F72-BD65-E742B8908D12}" type="datetimeFigureOut">
               <a:rPr lang="en-US" smtClean="0"/>
-              <a:t>2025-05-28</a:t>
+              <a:t>2025-06-08</a:t>
             </a:fld>
             <a:endParaRPr lang="en-US"/>
           </a:p>
@@ -2598,7 +2598,7 @@
           <a:p>
             <a:fld id="{B31607B0-DB75-4F72-BD65-E742B8908D12}" type="datetimeFigureOut">
               <a:rPr lang="en-US" smtClean="0"/>
-              <a:t>2025-05-28</a:t>
+              <a:t>2025-06-08</a:t>
             </a:fld>
             <a:endParaRPr lang="en-US"/>
           </a:p>
@@ -2909,7 +2909,7 @@
           <a:p>
             <a:fld id="{B31607B0-DB75-4F72-BD65-E742B8908D12}" type="datetimeFigureOut">
               <a:rPr lang="en-US" smtClean="0"/>
-              <a:t>2025-05-28</a:t>
+              <a:t>2025-06-08</a:t>
             </a:fld>
             <a:endParaRPr lang="en-US"/>
           </a:p>
@@ -3197,7 +3197,7 @@
           <a:p>
             <a:fld id="{B31607B0-DB75-4F72-BD65-E742B8908D12}" type="datetimeFigureOut">
               <a:rPr lang="en-US" smtClean="0"/>
-              <a:t>2025-05-28</a:t>
+              <a:t>2025-06-08</a:t>
             </a:fld>
             <a:endParaRPr lang="en-US"/>
           </a:p>
@@ -3438,7 +3438,7 @@
           <a:p>
             <a:fld id="{B31607B0-DB75-4F72-BD65-E742B8908D12}" type="datetimeFigureOut">
               <a:rPr lang="en-US" smtClean="0"/>
-              <a:t>2025-05-28</a:t>
+              <a:t>2025-06-08</a:t>
             </a:fld>
             <a:endParaRPr lang="en-US"/>
           </a:p>
@@ -11592,378 +11592,6 @@
           </a:p>
         </p:txBody>
       </p:sp>
-      <p:sp>
-        <p:nvSpPr>
-          <p:cNvPr id="33" name="Rectangle: Rounded Corners 32">
-            <a:extLst>
-              <a:ext uri="{FF2B5EF4-FFF2-40B4-BE49-F238E27FC236}">
-                <a16:creationId xmlns:a16="http://schemas.microsoft.com/office/drawing/2014/main" id="{E6A8F35D-3A65-84A3-FC81-A0FC1E701BD7}"/>
-              </a:ext>
-            </a:extLst>
-          </p:cNvPr>
-          <p:cNvSpPr/>
-          <p:nvPr/>
-        </p:nvSpPr>
-        <p:spPr>
-          <a:xfrm>
-            <a:off x="8621036" y="2538019"/>
-            <a:ext cx="3040381" cy="342900"/>
-          </a:xfrm>
-          <a:prstGeom prst="roundRect">
-            <a:avLst>
-              <a:gd name="adj" fmla="val 30000"/>
-            </a:avLst>
-          </a:prstGeom>
-          <a:solidFill>
-            <a:srgbClr val="E8D9C6"/>
-          </a:solidFill>
-          <a:ln w="28575">
-            <a:solidFill>
-              <a:srgbClr val="D4C1A9"/>
-            </a:solidFill>
-          </a:ln>
-        </p:spPr>
-        <p:style>
-          <a:lnRef idx="2">
-            <a:schemeClr val="accent1">
-              <a:shade val="15000"/>
-            </a:schemeClr>
-          </a:lnRef>
-          <a:fillRef idx="1">
-            <a:schemeClr val="accent1"/>
-          </a:fillRef>
-          <a:effectRef idx="0">
-            <a:schemeClr val="accent1"/>
-          </a:effectRef>
-          <a:fontRef idx="minor">
-            <a:schemeClr val="lt1"/>
-          </a:fontRef>
-        </p:style>
-        <p:txBody>
-          <a:bodyPr rtlCol="0" anchor="ctr"/>
-          <a:lstStyle/>
-          <a:p>
-            <a:pPr algn="ctr"/>
-            <a:r>
-              <a:rPr lang="en-US" b="1" dirty="0">
-                <a:latin typeface="Irish Grover" panose="02000000000000000000" pitchFamily="2" charset="0"/>
-                <a:cs typeface="Fredoka" pitchFamily="2" charset="-79"/>
-              </a:rPr>
-              <a:t>Unit 1</a:t>
-            </a:r>
-          </a:p>
-        </p:txBody>
-      </p:sp>
-      <p:sp>
-        <p:nvSpPr>
-          <p:cNvPr id="34" name="Rectangle: Rounded Corners 33">
-            <a:extLst>
-              <a:ext uri="{FF2B5EF4-FFF2-40B4-BE49-F238E27FC236}">
-                <a16:creationId xmlns:a16="http://schemas.microsoft.com/office/drawing/2014/main" id="{E973B217-BFC1-7C4F-258A-2096B90AFA23}"/>
-              </a:ext>
-            </a:extLst>
-          </p:cNvPr>
-          <p:cNvSpPr/>
-          <p:nvPr/>
-        </p:nvSpPr>
-        <p:spPr>
-          <a:xfrm>
-            <a:off x="8621036" y="3023468"/>
-            <a:ext cx="3040381" cy="342900"/>
-          </a:xfrm>
-          <a:prstGeom prst="roundRect">
-            <a:avLst>
-              <a:gd name="adj" fmla="val 30000"/>
-            </a:avLst>
-          </a:prstGeom>
-          <a:solidFill>
-            <a:srgbClr val="E8D9C6"/>
-          </a:solidFill>
-          <a:ln w="28575">
-            <a:solidFill>
-              <a:srgbClr val="D4C1A9"/>
-            </a:solidFill>
-          </a:ln>
-        </p:spPr>
-        <p:style>
-          <a:lnRef idx="2">
-            <a:schemeClr val="accent1">
-              <a:shade val="15000"/>
-            </a:schemeClr>
-          </a:lnRef>
-          <a:fillRef idx="1">
-            <a:schemeClr val="accent1"/>
-          </a:fillRef>
-          <a:effectRef idx="0">
-            <a:schemeClr val="accent1"/>
-          </a:effectRef>
-          <a:fontRef idx="minor">
-            <a:schemeClr val="lt1"/>
-          </a:fontRef>
-        </p:style>
-        <p:txBody>
-          <a:bodyPr rtlCol="0" anchor="ctr"/>
-          <a:lstStyle/>
-          <a:p>
-            <a:pPr algn="ctr"/>
-            <a:r>
-              <a:rPr lang="en-US" b="1" dirty="0">
-                <a:latin typeface="Irish Grover" panose="02000000000000000000" pitchFamily="2" charset="0"/>
-                <a:cs typeface="Fredoka" pitchFamily="2" charset="-79"/>
-              </a:rPr>
-              <a:t>Unit 2</a:t>
-            </a:r>
-          </a:p>
-        </p:txBody>
-      </p:sp>
-      <p:sp>
-        <p:nvSpPr>
-          <p:cNvPr id="35" name="Rectangle: Rounded Corners 34">
-            <a:extLst>
-              <a:ext uri="{FF2B5EF4-FFF2-40B4-BE49-F238E27FC236}">
-                <a16:creationId xmlns:a16="http://schemas.microsoft.com/office/drawing/2014/main" id="{99D0729A-BDFC-15D2-ABFA-C1F025912D9F}"/>
-              </a:ext>
-            </a:extLst>
-          </p:cNvPr>
-          <p:cNvSpPr/>
-          <p:nvPr/>
-        </p:nvSpPr>
-        <p:spPr>
-          <a:xfrm>
-            <a:off x="8621035" y="3509732"/>
-            <a:ext cx="3040381" cy="342900"/>
-          </a:xfrm>
-          <a:prstGeom prst="roundRect">
-            <a:avLst>
-              <a:gd name="adj" fmla="val 30000"/>
-            </a:avLst>
-          </a:prstGeom>
-          <a:solidFill>
-            <a:srgbClr val="E8D9C6"/>
-          </a:solidFill>
-          <a:ln w="28575">
-            <a:solidFill>
-              <a:srgbClr val="D4C1A9"/>
-            </a:solidFill>
-          </a:ln>
-        </p:spPr>
-        <p:style>
-          <a:lnRef idx="2">
-            <a:schemeClr val="accent1">
-              <a:shade val="15000"/>
-            </a:schemeClr>
-          </a:lnRef>
-          <a:fillRef idx="1">
-            <a:schemeClr val="accent1"/>
-          </a:fillRef>
-          <a:effectRef idx="0">
-            <a:schemeClr val="accent1"/>
-          </a:effectRef>
-          <a:fontRef idx="minor">
-            <a:schemeClr val="lt1"/>
-          </a:fontRef>
-        </p:style>
-        <p:txBody>
-          <a:bodyPr rtlCol="0" anchor="ctr"/>
-          <a:lstStyle/>
-          <a:p>
-            <a:pPr algn="ctr"/>
-            <a:r>
-              <a:rPr lang="en-US" b="1" dirty="0">
-                <a:latin typeface="Irish Grover" panose="02000000000000000000" pitchFamily="2" charset="0"/>
-                <a:cs typeface="Fredoka" pitchFamily="2" charset="-79"/>
-              </a:rPr>
-              <a:t>Unit 3</a:t>
-            </a:r>
-          </a:p>
-        </p:txBody>
-      </p:sp>
-      <p:sp>
-        <p:nvSpPr>
-          <p:cNvPr id="36" name="Rectangle: Rounded Corners 35">
-            <a:extLst>
-              <a:ext uri="{FF2B5EF4-FFF2-40B4-BE49-F238E27FC236}">
-                <a16:creationId xmlns:a16="http://schemas.microsoft.com/office/drawing/2014/main" id="{CCD5E265-3A66-CC77-CA12-A50EE3C6ECA1}"/>
-              </a:ext>
-            </a:extLst>
-          </p:cNvPr>
-          <p:cNvSpPr/>
-          <p:nvPr/>
-        </p:nvSpPr>
-        <p:spPr>
-          <a:xfrm>
-            <a:off x="8621034" y="3995181"/>
-            <a:ext cx="3040381" cy="342900"/>
-          </a:xfrm>
-          <a:prstGeom prst="roundRect">
-            <a:avLst>
-              <a:gd name="adj" fmla="val 30000"/>
-            </a:avLst>
-          </a:prstGeom>
-          <a:solidFill>
-            <a:srgbClr val="E8D9C6"/>
-          </a:solidFill>
-          <a:ln w="28575">
-            <a:solidFill>
-              <a:srgbClr val="D4C1A9"/>
-            </a:solidFill>
-          </a:ln>
-        </p:spPr>
-        <p:style>
-          <a:lnRef idx="2">
-            <a:schemeClr val="accent1">
-              <a:shade val="15000"/>
-            </a:schemeClr>
-          </a:lnRef>
-          <a:fillRef idx="1">
-            <a:schemeClr val="accent1"/>
-          </a:fillRef>
-          <a:effectRef idx="0">
-            <a:schemeClr val="accent1"/>
-          </a:effectRef>
-          <a:fontRef idx="minor">
-            <a:schemeClr val="lt1"/>
-          </a:fontRef>
-        </p:style>
-        <p:txBody>
-          <a:bodyPr rtlCol="0" anchor="ctr"/>
-          <a:lstStyle/>
-          <a:p>
-            <a:pPr algn="ctr"/>
-            <a:r>
-              <a:rPr lang="en-US" b="1" dirty="0">
-                <a:latin typeface="Irish Grover" panose="02000000000000000000" pitchFamily="2" charset="0"/>
-                <a:cs typeface="Fredoka" pitchFamily="2" charset="-79"/>
-              </a:rPr>
-              <a:t>Unit 4</a:t>
-            </a:r>
-          </a:p>
-        </p:txBody>
-      </p:sp>
-      <p:sp>
-        <p:nvSpPr>
-          <p:cNvPr id="37" name="Rectangle: Rounded Corners 36">
-            <a:extLst>
-              <a:ext uri="{FF2B5EF4-FFF2-40B4-BE49-F238E27FC236}">
-                <a16:creationId xmlns:a16="http://schemas.microsoft.com/office/drawing/2014/main" id="{3C197E55-5F27-E295-BBB5-D15DDB641E8A}"/>
-              </a:ext>
-            </a:extLst>
-          </p:cNvPr>
-          <p:cNvSpPr/>
-          <p:nvPr/>
-        </p:nvSpPr>
-        <p:spPr>
-          <a:xfrm>
-            <a:off x="8621033" y="4480630"/>
-            <a:ext cx="3040381" cy="342900"/>
-          </a:xfrm>
-          <a:prstGeom prst="roundRect">
-            <a:avLst>
-              <a:gd name="adj" fmla="val 30000"/>
-            </a:avLst>
-          </a:prstGeom>
-          <a:solidFill>
-            <a:srgbClr val="E8D9C6"/>
-          </a:solidFill>
-          <a:ln w="28575">
-            <a:solidFill>
-              <a:srgbClr val="D4C1A9"/>
-            </a:solidFill>
-          </a:ln>
-        </p:spPr>
-        <p:style>
-          <a:lnRef idx="2">
-            <a:schemeClr val="accent1">
-              <a:shade val="15000"/>
-            </a:schemeClr>
-          </a:lnRef>
-          <a:fillRef idx="1">
-            <a:schemeClr val="accent1"/>
-          </a:fillRef>
-          <a:effectRef idx="0">
-            <a:schemeClr val="accent1"/>
-          </a:effectRef>
-          <a:fontRef idx="minor">
-            <a:schemeClr val="lt1"/>
-          </a:fontRef>
-        </p:style>
-        <p:txBody>
-          <a:bodyPr rtlCol="0" anchor="ctr"/>
-          <a:lstStyle/>
-          <a:p>
-            <a:pPr algn="ctr"/>
-            <a:r>
-              <a:rPr lang="en-US" b="1" dirty="0">
-                <a:latin typeface="Irish Grover" panose="02000000000000000000" pitchFamily="2" charset="0"/>
-                <a:cs typeface="Fredoka" pitchFamily="2" charset="-79"/>
-              </a:rPr>
-              <a:t>Unit 5</a:t>
-            </a:r>
-          </a:p>
-        </p:txBody>
-      </p:sp>
-      <p:sp>
-        <p:nvSpPr>
-          <p:cNvPr id="38" name="Rectangle: Rounded Corners 37">
-            <a:extLst>
-              <a:ext uri="{FF2B5EF4-FFF2-40B4-BE49-F238E27FC236}">
-                <a16:creationId xmlns:a16="http://schemas.microsoft.com/office/drawing/2014/main" id="{2A56EB7B-C95B-07A1-4CCF-00DA3A0D5821}"/>
-              </a:ext>
-            </a:extLst>
-          </p:cNvPr>
-          <p:cNvSpPr/>
-          <p:nvPr/>
-        </p:nvSpPr>
-        <p:spPr>
-          <a:xfrm>
-            <a:off x="8621033" y="4943039"/>
-            <a:ext cx="3040381" cy="342900"/>
-          </a:xfrm>
-          <a:prstGeom prst="roundRect">
-            <a:avLst>
-              <a:gd name="adj" fmla="val 30000"/>
-            </a:avLst>
-          </a:prstGeom>
-          <a:solidFill>
-            <a:srgbClr val="E8D9C6"/>
-          </a:solidFill>
-          <a:ln w="28575">
-            <a:solidFill>
-              <a:srgbClr val="D4C1A9"/>
-            </a:solidFill>
-          </a:ln>
-        </p:spPr>
-        <p:style>
-          <a:lnRef idx="2">
-            <a:schemeClr val="accent1">
-              <a:shade val="15000"/>
-            </a:schemeClr>
-          </a:lnRef>
-          <a:fillRef idx="1">
-            <a:schemeClr val="accent1"/>
-          </a:fillRef>
-          <a:effectRef idx="0">
-            <a:schemeClr val="accent1"/>
-          </a:effectRef>
-          <a:fontRef idx="minor">
-            <a:schemeClr val="lt1"/>
-          </a:fontRef>
-        </p:style>
-        <p:txBody>
-          <a:bodyPr rtlCol="0" anchor="ctr"/>
-          <a:lstStyle/>
-          <a:p>
-            <a:pPr algn="ctr"/>
-            <a:r>
-              <a:rPr lang="en-US" b="1" dirty="0">
-                <a:latin typeface="Irish Grover" panose="02000000000000000000" pitchFamily="2" charset="0"/>
-                <a:cs typeface="Fredoka" pitchFamily="2" charset="-79"/>
-              </a:rPr>
-              <a:t>Unit 6</a:t>
-            </a:r>
-          </a:p>
-        </p:txBody>
-      </p:sp>
       <p:pic>
         <p:nvPicPr>
           <p:cNvPr id="39" name="Picture 38">
@@ -12495,6 +12123,502 @@
         <p:spPr>
           <a:xfrm>
             <a:off x="4961121" y="5102991"/>
+            <a:ext cx="2378761" cy="270777"/>
+          </a:xfrm>
+          <a:prstGeom prst="roundRect">
+            <a:avLst>
+              <a:gd name="adj" fmla="val 30000"/>
+            </a:avLst>
+          </a:prstGeom>
+          <a:solidFill>
+            <a:srgbClr val="E8D9C6"/>
+          </a:solidFill>
+          <a:ln w="28575">
+            <a:solidFill>
+              <a:srgbClr val="D4C1A9"/>
+            </a:solidFill>
+          </a:ln>
+        </p:spPr>
+        <p:style>
+          <a:lnRef idx="2">
+            <a:schemeClr val="accent1">
+              <a:shade val="15000"/>
+            </a:schemeClr>
+          </a:lnRef>
+          <a:fillRef idx="1">
+            <a:schemeClr val="accent1"/>
+          </a:fillRef>
+          <a:effectRef idx="0">
+            <a:schemeClr val="accent1"/>
+          </a:effectRef>
+          <a:fontRef idx="minor">
+            <a:schemeClr val="lt1"/>
+          </a:fontRef>
+        </p:style>
+        <p:txBody>
+          <a:bodyPr rtlCol="0" anchor="ctr"/>
+          <a:lstStyle/>
+          <a:p>
+            <a:pPr algn="ctr"/>
+            <a:r>
+              <a:rPr lang="en-US" sz="1400" b="1" dirty="0">
+                <a:latin typeface="Irish Grover" panose="02000000000000000000" pitchFamily="2" charset="0"/>
+                <a:cs typeface="Fredoka" pitchFamily="2" charset="-79"/>
+              </a:rPr>
+              <a:t>Regular &amp; Irregular Verbs</a:t>
+            </a:r>
+          </a:p>
+        </p:txBody>
+      </p:sp>
+      <p:sp>
+        <p:nvSpPr>
+          <p:cNvPr id="8" name="Rectangle: Rounded Corners 7">
+            <a:extLst>
+              <a:ext uri="{FF2B5EF4-FFF2-40B4-BE49-F238E27FC236}">
+                <a16:creationId xmlns:a16="http://schemas.microsoft.com/office/drawing/2014/main" id="{E7593B60-D40D-D162-ABE6-0648E89EAD14}"/>
+              </a:ext>
+            </a:extLst>
+          </p:cNvPr>
+          <p:cNvSpPr/>
+          <p:nvPr/>
+        </p:nvSpPr>
+        <p:spPr>
+          <a:xfrm>
+            <a:off x="8945797" y="2590758"/>
+            <a:ext cx="2378761" cy="270777"/>
+          </a:xfrm>
+          <a:prstGeom prst="roundRect">
+            <a:avLst>
+              <a:gd name="adj" fmla="val 30000"/>
+            </a:avLst>
+          </a:prstGeom>
+          <a:solidFill>
+            <a:srgbClr val="E8D9C6"/>
+          </a:solidFill>
+          <a:ln w="28575">
+            <a:solidFill>
+              <a:srgbClr val="D4C1A9"/>
+            </a:solidFill>
+          </a:ln>
+        </p:spPr>
+        <p:style>
+          <a:lnRef idx="2">
+            <a:schemeClr val="accent1">
+              <a:shade val="15000"/>
+            </a:schemeClr>
+          </a:lnRef>
+          <a:fillRef idx="1">
+            <a:schemeClr val="accent1"/>
+          </a:fillRef>
+          <a:effectRef idx="0">
+            <a:schemeClr val="accent1"/>
+          </a:effectRef>
+          <a:fontRef idx="minor">
+            <a:schemeClr val="lt1"/>
+          </a:fontRef>
+        </p:style>
+        <p:txBody>
+          <a:bodyPr rtlCol="0" anchor="ctr"/>
+          <a:lstStyle/>
+          <a:p>
+            <a:pPr algn="ctr"/>
+            <a:r>
+              <a:rPr lang="en-US" sz="1400" b="1" dirty="0">
+                <a:latin typeface="Irish Grover" panose="02000000000000000000" pitchFamily="2" charset="0"/>
+                <a:cs typeface="Fredoka" pitchFamily="2" charset="-79"/>
+              </a:rPr>
+              <a:t>Frequency Adverbs</a:t>
+            </a:r>
+          </a:p>
+        </p:txBody>
+      </p:sp>
+      <p:sp>
+        <p:nvSpPr>
+          <p:cNvPr id="23" name="Rectangle: Rounded Corners 22">
+            <a:extLst>
+              <a:ext uri="{FF2B5EF4-FFF2-40B4-BE49-F238E27FC236}">
+                <a16:creationId xmlns:a16="http://schemas.microsoft.com/office/drawing/2014/main" id="{EA2B6F21-F2BD-49F5-E1AA-0CC78F0E6709}"/>
+              </a:ext>
+            </a:extLst>
+          </p:cNvPr>
+          <p:cNvSpPr/>
+          <p:nvPr/>
+        </p:nvSpPr>
+        <p:spPr>
+          <a:xfrm>
+            <a:off x="8945797" y="2932505"/>
+            <a:ext cx="2378761" cy="270777"/>
+          </a:xfrm>
+          <a:prstGeom prst="roundRect">
+            <a:avLst>
+              <a:gd name="adj" fmla="val 30000"/>
+            </a:avLst>
+          </a:prstGeom>
+          <a:solidFill>
+            <a:srgbClr val="E8D9C6"/>
+          </a:solidFill>
+          <a:ln w="28575">
+            <a:solidFill>
+              <a:srgbClr val="D4C1A9"/>
+            </a:solidFill>
+          </a:ln>
+        </p:spPr>
+        <p:style>
+          <a:lnRef idx="2">
+            <a:schemeClr val="accent1">
+              <a:shade val="15000"/>
+            </a:schemeClr>
+          </a:lnRef>
+          <a:fillRef idx="1">
+            <a:schemeClr val="accent1"/>
+          </a:fillRef>
+          <a:effectRef idx="0">
+            <a:schemeClr val="accent1"/>
+          </a:effectRef>
+          <a:fontRef idx="minor">
+            <a:schemeClr val="lt1"/>
+          </a:fontRef>
+        </p:style>
+        <p:txBody>
+          <a:bodyPr rtlCol="0" anchor="ctr"/>
+          <a:lstStyle/>
+          <a:p>
+            <a:pPr algn="ctr"/>
+            <a:r>
+              <a:rPr lang="en-US" sz="1400" b="1" dirty="0">
+                <a:latin typeface="Irish Grover" panose="02000000000000000000" pitchFamily="2" charset="0"/>
+                <a:cs typeface="Fredoka" pitchFamily="2" charset="-79"/>
+              </a:rPr>
+              <a:t>Future Tense</a:t>
+            </a:r>
+          </a:p>
+        </p:txBody>
+      </p:sp>
+      <p:sp>
+        <p:nvSpPr>
+          <p:cNvPr id="24" name="Rectangle: Rounded Corners 23">
+            <a:extLst>
+              <a:ext uri="{FF2B5EF4-FFF2-40B4-BE49-F238E27FC236}">
+                <a16:creationId xmlns:a16="http://schemas.microsoft.com/office/drawing/2014/main" id="{315B9DAF-2306-78B8-8C84-538ABABDF00B}"/>
+              </a:ext>
+            </a:extLst>
+          </p:cNvPr>
+          <p:cNvSpPr/>
+          <p:nvPr/>
+        </p:nvSpPr>
+        <p:spPr>
+          <a:xfrm>
+            <a:off x="8938176" y="3274430"/>
+            <a:ext cx="2378761" cy="270777"/>
+          </a:xfrm>
+          <a:prstGeom prst="roundRect">
+            <a:avLst>
+              <a:gd name="adj" fmla="val 30000"/>
+            </a:avLst>
+          </a:prstGeom>
+          <a:solidFill>
+            <a:srgbClr val="E8D9C6"/>
+          </a:solidFill>
+          <a:ln w="28575">
+            <a:solidFill>
+              <a:srgbClr val="D4C1A9"/>
+            </a:solidFill>
+          </a:ln>
+        </p:spPr>
+        <p:style>
+          <a:lnRef idx="2">
+            <a:schemeClr val="accent1">
+              <a:shade val="15000"/>
+            </a:schemeClr>
+          </a:lnRef>
+          <a:fillRef idx="1">
+            <a:schemeClr val="accent1"/>
+          </a:fillRef>
+          <a:effectRef idx="0">
+            <a:schemeClr val="accent1"/>
+          </a:effectRef>
+          <a:fontRef idx="minor">
+            <a:schemeClr val="lt1"/>
+          </a:fontRef>
+        </p:style>
+        <p:txBody>
+          <a:bodyPr rtlCol="0" anchor="ctr"/>
+          <a:lstStyle/>
+          <a:p>
+            <a:pPr algn="ctr"/>
+            <a:r>
+              <a:rPr lang="en-US" sz="1400" b="1" dirty="0">
+                <a:latin typeface="Irish Grover" panose="02000000000000000000" pitchFamily="2" charset="0"/>
+                <a:cs typeface="Fredoka" pitchFamily="2" charset="-79"/>
+              </a:rPr>
+              <a:t>Making Comparisons</a:t>
+            </a:r>
+          </a:p>
+        </p:txBody>
+      </p:sp>
+      <p:sp>
+        <p:nvSpPr>
+          <p:cNvPr id="25" name="Rectangle: Rounded Corners 24">
+            <a:extLst>
+              <a:ext uri="{FF2B5EF4-FFF2-40B4-BE49-F238E27FC236}">
+                <a16:creationId xmlns:a16="http://schemas.microsoft.com/office/drawing/2014/main" id="{B482320C-813B-5B5C-9A14-FB5005BDF411}"/>
+              </a:ext>
+            </a:extLst>
+          </p:cNvPr>
+          <p:cNvSpPr/>
+          <p:nvPr/>
+        </p:nvSpPr>
+        <p:spPr>
+          <a:xfrm>
+            <a:off x="8945797" y="3610405"/>
+            <a:ext cx="2378761" cy="270777"/>
+          </a:xfrm>
+          <a:prstGeom prst="roundRect">
+            <a:avLst>
+              <a:gd name="adj" fmla="val 30000"/>
+            </a:avLst>
+          </a:prstGeom>
+          <a:solidFill>
+            <a:srgbClr val="E8D9C6"/>
+          </a:solidFill>
+          <a:ln w="28575">
+            <a:solidFill>
+              <a:srgbClr val="D4C1A9"/>
+            </a:solidFill>
+          </a:ln>
+        </p:spPr>
+        <p:style>
+          <a:lnRef idx="2">
+            <a:schemeClr val="accent1">
+              <a:shade val="15000"/>
+            </a:schemeClr>
+          </a:lnRef>
+          <a:fillRef idx="1">
+            <a:schemeClr val="accent1"/>
+          </a:fillRef>
+          <a:effectRef idx="0">
+            <a:schemeClr val="accent1"/>
+          </a:effectRef>
+          <a:fontRef idx="minor">
+            <a:schemeClr val="lt1"/>
+          </a:fontRef>
+        </p:style>
+        <p:txBody>
+          <a:bodyPr rtlCol="0" anchor="ctr"/>
+          <a:lstStyle/>
+          <a:p>
+            <a:pPr algn="ctr"/>
+            <a:r>
+              <a:rPr lang="en-US" sz="1400" b="1" dirty="0">
+                <a:latin typeface="Irish Grover" panose="02000000000000000000" pitchFamily="2" charset="0"/>
+                <a:cs typeface="Fredoka" pitchFamily="2" charset="-79"/>
+              </a:rPr>
+              <a:t>Modal Verbs</a:t>
+            </a:r>
+          </a:p>
+        </p:txBody>
+      </p:sp>
+      <p:sp>
+        <p:nvSpPr>
+          <p:cNvPr id="26" name="Rectangle: Rounded Corners 25">
+            <a:extLst>
+              <a:ext uri="{FF2B5EF4-FFF2-40B4-BE49-F238E27FC236}">
+                <a16:creationId xmlns:a16="http://schemas.microsoft.com/office/drawing/2014/main" id="{6B0CAE5A-1523-0E42-78AC-CF03B6C466AE}"/>
+              </a:ext>
+            </a:extLst>
+          </p:cNvPr>
+          <p:cNvSpPr/>
+          <p:nvPr/>
+        </p:nvSpPr>
+        <p:spPr>
+          <a:xfrm>
+            <a:off x="8945797" y="3945461"/>
+            <a:ext cx="2378761" cy="270777"/>
+          </a:xfrm>
+          <a:prstGeom prst="roundRect">
+            <a:avLst>
+              <a:gd name="adj" fmla="val 30000"/>
+            </a:avLst>
+          </a:prstGeom>
+          <a:solidFill>
+            <a:srgbClr val="E8D9C6"/>
+          </a:solidFill>
+          <a:ln w="28575">
+            <a:solidFill>
+              <a:srgbClr val="D4C1A9"/>
+            </a:solidFill>
+          </a:ln>
+        </p:spPr>
+        <p:style>
+          <a:lnRef idx="2">
+            <a:schemeClr val="accent1">
+              <a:shade val="15000"/>
+            </a:schemeClr>
+          </a:lnRef>
+          <a:fillRef idx="1">
+            <a:schemeClr val="accent1"/>
+          </a:fillRef>
+          <a:effectRef idx="0">
+            <a:schemeClr val="accent1"/>
+          </a:effectRef>
+          <a:fontRef idx="minor">
+            <a:schemeClr val="lt1"/>
+          </a:fontRef>
+        </p:style>
+        <p:txBody>
+          <a:bodyPr rtlCol="0" anchor="ctr"/>
+          <a:lstStyle/>
+          <a:p>
+            <a:pPr algn="ctr"/>
+            <a:r>
+              <a:rPr lang="en-US" sz="1400" b="1" dirty="0">
+                <a:latin typeface="Irish Grover" panose="02000000000000000000" pitchFamily="2" charset="0"/>
+                <a:cs typeface="Fredoka" pitchFamily="2" charset="-79"/>
+              </a:rPr>
+              <a:t>Present Simple</a:t>
+            </a:r>
+          </a:p>
+        </p:txBody>
+      </p:sp>
+      <p:sp>
+        <p:nvSpPr>
+          <p:cNvPr id="27" name="Rectangle: Rounded Corners 26">
+            <a:extLst>
+              <a:ext uri="{FF2B5EF4-FFF2-40B4-BE49-F238E27FC236}">
+                <a16:creationId xmlns:a16="http://schemas.microsoft.com/office/drawing/2014/main" id="{0833472E-C032-7449-305A-4D4B6946FA52}"/>
+              </a:ext>
+            </a:extLst>
+          </p:cNvPr>
+          <p:cNvSpPr/>
+          <p:nvPr/>
+        </p:nvSpPr>
+        <p:spPr>
+          <a:xfrm>
+            <a:off x="8938175" y="4288305"/>
+            <a:ext cx="2378761" cy="270777"/>
+          </a:xfrm>
+          <a:prstGeom prst="roundRect">
+            <a:avLst>
+              <a:gd name="adj" fmla="val 30000"/>
+            </a:avLst>
+          </a:prstGeom>
+          <a:solidFill>
+            <a:srgbClr val="E8D9C6"/>
+          </a:solidFill>
+          <a:ln w="28575">
+            <a:solidFill>
+              <a:srgbClr val="D4C1A9"/>
+            </a:solidFill>
+          </a:ln>
+        </p:spPr>
+        <p:style>
+          <a:lnRef idx="2">
+            <a:schemeClr val="accent1">
+              <a:shade val="15000"/>
+            </a:schemeClr>
+          </a:lnRef>
+          <a:fillRef idx="1">
+            <a:schemeClr val="accent1"/>
+          </a:fillRef>
+          <a:effectRef idx="0">
+            <a:schemeClr val="accent1"/>
+          </a:effectRef>
+          <a:fontRef idx="minor">
+            <a:schemeClr val="lt1"/>
+          </a:fontRef>
+        </p:style>
+        <p:txBody>
+          <a:bodyPr rtlCol="0" anchor="ctr"/>
+          <a:lstStyle/>
+          <a:p>
+            <a:pPr algn="ctr"/>
+            <a:r>
+              <a:rPr lang="en-US" sz="1400" b="1" dirty="0">
+                <a:latin typeface="Irish Grover" panose="02000000000000000000" pitchFamily="2" charset="0"/>
+                <a:cs typeface="Fredoka" pitchFamily="2" charset="-79"/>
+              </a:rPr>
+              <a:t>Present Continuous</a:t>
+            </a:r>
+          </a:p>
+        </p:txBody>
+      </p:sp>
+      <p:sp>
+        <p:nvSpPr>
+          <p:cNvPr id="42" name="Rectangle: Rounded Corners 41">
+            <a:extLst>
+              <a:ext uri="{FF2B5EF4-FFF2-40B4-BE49-F238E27FC236}">
+                <a16:creationId xmlns:a16="http://schemas.microsoft.com/office/drawing/2014/main" id="{DDDA37E3-1F83-C59B-E7BF-3AF4C996CAC5}"/>
+              </a:ext>
+            </a:extLst>
+          </p:cNvPr>
+          <p:cNvSpPr/>
+          <p:nvPr/>
+        </p:nvSpPr>
+        <p:spPr>
+          <a:xfrm>
+            <a:off x="8938175" y="4618363"/>
+            <a:ext cx="2378761" cy="270777"/>
+          </a:xfrm>
+          <a:prstGeom prst="roundRect">
+            <a:avLst>
+              <a:gd name="adj" fmla="val 30000"/>
+            </a:avLst>
+          </a:prstGeom>
+          <a:solidFill>
+            <a:srgbClr val="E8D9C6"/>
+          </a:solidFill>
+          <a:ln w="28575">
+            <a:solidFill>
+              <a:srgbClr val="D4C1A9"/>
+            </a:solidFill>
+          </a:ln>
+        </p:spPr>
+        <p:style>
+          <a:lnRef idx="2">
+            <a:schemeClr val="accent1">
+              <a:shade val="15000"/>
+            </a:schemeClr>
+          </a:lnRef>
+          <a:fillRef idx="1">
+            <a:schemeClr val="accent1"/>
+          </a:fillRef>
+          <a:effectRef idx="0">
+            <a:schemeClr val="accent1"/>
+          </a:effectRef>
+          <a:fontRef idx="minor">
+            <a:schemeClr val="lt1"/>
+          </a:fontRef>
+        </p:style>
+        <p:txBody>
+          <a:bodyPr rtlCol="0" anchor="ctr"/>
+          <a:lstStyle/>
+          <a:p>
+            <a:pPr algn="ctr"/>
+            <a:r>
+              <a:rPr lang="en-US" sz="1400" b="1" dirty="0">
+                <a:latin typeface="Irish Grover" panose="02000000000000000000" pitchFamily="2" charset="0"/>
+                <a:cs typeface="Fredoka" pitchFamily="2" charset="-79"/>
+              </a:rPr>
+              <a:t>Simple Past Tense</a:t>
+            </a:r>
+          </a:p>
+        </p:txBody>
+      </p:sp>
+      <p:sp>
+        <p:nvSpPr>
+          <p:cNvPr id="50" name="Rectangle: Rounded Corners 49">
+            <a:extLst>
+              <a:ext uri="{FF2B5EF4-FFF2-40B4-BE49-F238E27FC236}">
+                <a16:creationId xmlns:a16="http://schemas.microsoft.com/office/drawing/2014/main" id="{56CE791D-2E53-CB01-D838-EC039D4FFCF4}"/>
+              </a:ext>
+            </a:extLst>
+          </p:cNvPr>
+          <p:cNvSpPr/>
+          <p:nvPr/>
+        </p:nvSpPr>
+        <p:spPr>
+          <a:xfrm>
+            <a:off x="8938175" y="4948421"/>
             <a:ext cx="2378761" cy="270777"/>
           </a:xfrm>
           <a:prstGeom prst="roundRect">
